--- a/slide/7_Multiple_Regression_Model_I.pptx
+++ b/slide/7_Multiple_Regression_Model_I.pptx
@@ -5,7 +5,7 @@
     <p:sldMasterId id="2147483660" r:id="rId1"/>
   </p:sldMasterIdLst>
   <p:notesMasterIdLst>
-    <p:notesMasterId r:id="rId24"/>
+    <p:notesMasterId r:id="rId23"/>
   </p:notesMasterIdLst>
   <p:sldIdLst>
     <p:sldId id="256" r:id="rId2"/>
@@ -18,18 +18,17 @@
     <p:sldId id="263" r:id="rId9"/>
     <p:sldId id="264" r:id="rId10"/>
     <p:sldId id="265" r:id="rId11"/>
-    <p:sldId id="277" r:id="rId12"/>
-    <p:sldId id="266" r:id="rId13"/>
-    <p:sldId id="267" r:id="rId14"/>
-    <p:sldId id="268" r:id="rId15"/>
-    <p:sldId id="269" r:id="rId16"/>
-    <p:sldId id="270" r:id="rId17"/>
-    <p:sldId id="271" r:id="rId18"/>
-    <p:sldId id="272" r:id="rId19"/>
-    <p:sldId id="273" r:id="rId20"/>
-    <p:sldId id="274" r:id="rId21"/>
-    <p:sldId id="275" r:id="rId22"/>
-    <p:sldId id="276" r:id="rId23"/>
+    <p:sldId id="266" r:id="rId12"/>
+    <p:sldId id="267" r:id="rId13"/>
+    <p:sldId id="268" r:id="rId14"/>
+    <p:sldId id="269" r:id="rId15"/>
+    <p:sldId id="270" r:id="rId16"/>
+    <p:sldId id="271" r:id="rId17"/>
+    <p:sldId id="272" r:id="rId18"/>
+    <p:sldId id="273" r:id="rId19"/>
+    <p:sldId id="274" r:id="rId20"/>
+    <p:sldId id="275" r:id="rId21"/>
+    <p:sldId id="276" r:id="rId22"/>
   </p:sldIdLst>
   <p:sldSz cx="12192000" cy="6858000"/>
   <p:notesSz cx="6858000" cy="9144000"/>
@@ -139,14 +138,14 @@
 <file path=ppt/changesInfos/changesInfo1.xml><?xml version="1.0" encoding="utf-8"?>
 <pc:chgInfo xmlns:a="http://schemas.openxmlformats.org/drawingml/2006/main" xmlns:r="http://schemas.openxmlformats.org/officeDocument/2006/relationships" xmlns:ac="http://schemas.microsoft.com/office/drawing/2013/main/command" xmlns:pc="http://schemas.microsoft.com/office/powerpoint/2013/main/command">
   <pc:docChgLst>
-    <pc:chgData name="Sebastian Vallejo Vera" userId="661f42ee-5565-49c4-8b1d-325f2d699b91" providerId="ADAL" clId="{17B99290-B46C-284F-A408-B70FFC052508}"/>
-    <pc:docChg chg="addSld">
-      <pc:chgData name="Sebastian Vallejo Vera" userId="661f42ee-5565-49c4-8b1d-325f2d699b91" providerId="ADAL" clId="{17B99290-B46C-284F-A408-B70FFC052508}" dt="2025-03-04T15:04:03.708" v="0" actId="680"/>
+    <pc:chgData name="Sebastian Vallejo Vera" userId="661f42ee-5565-49c4-8b1d-325f2d699b91" providerId="ADAL" clId="{A248EEF8-C29E-592E-8CA9-13334A969EB7}"/>
+    <pc:docChg chg="delSld">
+      <pc:chgData name="Sebastian Vallejo Vera" userId="661f42ee-5565-49c4-8b1d-325f2d699b91" providerId="ADAL" clId="{A248EEF8-C29E-592E-8CA9-13334A969EB7}" dt="2026-02-03T01:36:46.273" v="0" actId="2696"/>
       <pc:docMkLst>
         <pc:docMk/>
       </pc:docMkLst>
-      <pc:sldChg chg="new">
-        <pc:chgData name="Sebastian Vallejo Vera" userId="661f42ee-5565-49c4-8b1d-325f2d699b91" providerId="ADAL" clId="{17B99290-B46C-284F-A408-B70FFC052508}" dt="2025-03-04T15:04:03.708" v="0" actId="680"/>
+      <pc:sldChg chg="del">
+        <pc:chgData name="Sebastian Vallejo Vera" userId="661f42ee-5565-49c4-8b1d-325f2d699b91" providerId="ADAL" clId="{A248EEF8-C29E-592E-8CA9-13334A969EB7}" dt="2026-02-03T01:36:46.273" v="0" actId="2696"/>
         <pc:sldMkLst>
           <pc:docMk/>
           <pc:sldMk cId="1838658543" sldId="277"/>
@@ -239,7 +238,7 @@
           <a:p>
             <a:fld id="{34E26900-7493-9448-A3BF-F5ABBAAD5ADF}" type="datetimeFigureOut">
               <a:rPr lang="en-US" smtClean="0"/>
-              <a:t>3/4/25</a:t>
+              <a:t>2/2/26</a:t>
             </a:fld>
             <a:endParaRPr lang="en-US"/>
           </a:p>
@@ -1660,6 +1659,13 @@
             <a:tailEnd/>
           </a:ln>
         </p:spPr>
+        <p:txBody>
+          <a:bodyPr/>
+          <a:lstStyle/>
+          <a:p>
+            <a:endParaRPr lang="en-US"/>
+          </a:p>
+        </p:txBody>
       </p:sp>
       <p:sp>
         <p:nvSpPr>
@@ -1801,7 +1807,7 @@
           <a:p>
             <a:fld id="{981FC1AB-544C-104E-8A1C-5A8C9E1A53F0}" type="datetimeFigureOut">
               <a:rPr lang="en-US" smtClean="0"/>
-              <a:t>3/4/25</a:t>
+              <a:t>2/2/26</a:t>
             </a:fld>
             <a:endParaRPr lang="en-US"/>
           </a:p>
@@ -1916,6 +1922,13 @@
             <a:schemeClr val="lt1"/>
           </a:fontRef>
         </p:style>
+        <p:txBody>
+          <a:bodyPr/>
+          <a:lstStyle/>
+          <a:p>
+            <a:endParaRPr lang="en-US"/>
+          </a:p>
+        </p:txBody>
       </p:sp>
     </p:spTree>
     <p:extLst>
@@ -2039,7 +2052,7 @@
           <a:p>
             <a:fld id="{981FC1AB-544C-104E-8A1C-5A8C9E1A53F0}" type="datetimeFigureOut">
               <a:rPr lang="en-US" smtClean="0"/>
-              <a:t>3/4/25</a:t>
+              <a:t>2/2/26</a:t>
             </a:fld>
             <a:endParaRPr lang="en-US"/>
           </a:p>
@@ -2219,7 +2232,7 @@
           <a:p>
             <a:fld id="{981FC1AB-544C-104E-8A1C-5A8C9E1A53F0}" type="datetimeFigureOut">
               <a:rPr lang="en-US" smtClean="0"/>
-              <a:t>3/4/25</a:t>
+              <a:t>2/2/26</a:t>
             </a:fld>
             <a:endParaRPr lang="en-US"/>
           </a:p>
@@ -2389,7 +2402,7 @@
           <a:p>
             <a:fld id="{981FC1AB-544C-104E-8A1C-5A8C9E1A53F0}" type="datetimeFigureOut">
               <a:rPr lang="en-US" smtClean="0"/>
-              <a:t>3/4/25</a:t>
+              <a:t>2/2/26</a:t>
             </a:fld>
             <a:endParaRPr lang="en-US"/>
           </a:p>
@@ -2665,7 +2678,7 @@
           <a:p>
             <a:fld id="{981FC1AB-544C-104E-8A1C-5A8C9E1A53F0}" type="datetimeFigureOut">
               <a:rPr lang="en-US" smtClean="0"/>
-              <a:t>3/4/25</a:t>
+              <a:t>2/2/26</a:t>
             </a:fld>
             <a:endParaRPr lang="en-US"/>
           </a:p>
@@ -3866,7 +3879,7 @@
           <a:p>
             <a:fld id="{981FC1AB-544C-104E-8A1C-5A8C9E1A53F0}" type="datetimeFigureOut">
               <a:rPr lang="en-US" smtClean="0"/>
-              <a:t>3/4/25</a:t>
+              <a:t>2/2/26</a:t>
             </a:fld>
             <a:endParaRPr lang="en-US"/>
           </a:p>
@@ -4256,7 +4269,7 @@
           <a:p>
             <a:fld id="{981FC1AB-544C-104E-8A1C-5A8C9E1A53F0}" type="datetimeFigureOut">
               <a:rPr lang="en-US" smtClean="0"/>
-              <a:t>3/4/25</a:t>
+              <a:t>2/2/26</a:t>
             </a:fld>
             <a:endParaRPr lang="en-US"/>
           </a:p>
@@ -4379,7 +4392,7 @@
           <a:p>
             <a:fld id="{981FC1AB-544C-104E-8A1C-5A8C9E1A53F0}" type="datetimeFigureOut">
               <a:rPr lang="en-US" smtClean="0"/>
-              <a:t>3/4/25</a:t>
+              <a:t>2/2/26</a:t>
             </a:fld>
             <a:endParaRPr lang="en-US"/>
           </a:p>
@@ -4474,7 +4487,7 @@
           <a:p>
             <a:fld id="{981FC1AB-544C-104E-8A1C-5A8C9E1A53F0}" type="datetimeFigureOut">
               <a:rPr lang="en-US" smtClean="0"/>
-              <a:t>3/4/25</a:t>
+              <a:t>2/2/26</a:t>
             </a:fld>
             <a:endParaRPr lang="en-US"/>
           </a:p>
@@ -5237,7 +5250,7 @@
           <a:p>
             <a:fld id="{981FC1AB-544C-104E-8A1C-5A8C9E1A53F0}" type="datetimeFigureOut">
               <a:rPr lang="en-US" smtClean="0"/>
-              <a:t>3/4/25</a:t>
+              <a:t>2/2/26</a:t>
             </a:fld>
             <a:endParaRPr lang="en-US"/>
           </a:p>
@@ -6077,7 +6090,7 @@
           <a:p>
             <a:fld id="{981FC1AB-544C-104E-8A1C-5A8C9E1A53F0}" type="datetimeFigureOut">
               <a:rPr lang="en-US" smtClean="0"/>
-              <a:t>3/4/25</a:t>
+              <a:t>2/2/26</a:t>
             </a:fld>
             <a:endParaRPr lang="en-US"/>
           </a:p>
@@ -6304,7 +6317,7 @@
           <a:p>
             <a:fld id="{981FC1AB-544C-104E-8A1C-5A8C9E1A53F0}" type="datetimeFigureOut">
               <a:rPr lang="en-US" smtClean="0"/>
-              <a:t>3/4/25</a:t>
+              <a:t>2/2/26</a:t>
             </a:fld>
             <a:endParaRPr lang="en-US"/>
           </a:p>
@@ -6853,6 +6866,13 @@
             <a:tailEnd/>
           </a:ln>
         </p:spPr>
+        <p:txBody>
+          <a:bodyPr/>
+          <a:lstStyle/>
+          <a:p>
+            <a:endParaRPr lang="en-US"/>
+          </a:p>
+        </p:txBody>
       </p:sp>
       <p:sp>
         <p:nvSpPr>
@@ -6891,6 +6911,13 @@
             <a:schemeClr val="lt1"/>
           </a:fontRef>
         </p:style>
+        <p:txBody>
+          <a:bodyPr/>
+          <a:lstStyle/>
+          <a:p>
+            <a:endParaRPr lang="en-US"/>
+          </a:p>
+        </p:txBody>
       </p:sp>
     </p:spTree>
     <p:extLst>
@@ -7586,36 +7613,6 @@
           <a:chExt cx="0" cy="0"/>
         </a:xfrm>
       </p:grpSpPr>
-    </p:spTree>
-    <p:extLst>
-      <p:ext uri="{BB962C8B-B14F-4D97-AF65-F5344CB8AC3E}">
-        <p14:creationId xmlns:p14="http://schemas.microsoft.com/office/powerpoint/2010/main" val="1838658543"/>
-      </p:ext>
-    </p:extLst>
-  </p:cSld>
-  <p:clrMapOvr>
-    <a:masterClrMapping/>
-  </p:clrMapOvr>
-</p:sld>
-</file>
-
-<file path=ppt/slides/slide12.xml><?xml version="1.0" encoding="utf-8"?>
-<p:sld xmlns:a="http://schemas.openxmlformats.org/drawingml/2006/main" xmlns:r="http://schemas.openxmlformats.org/officeDocument/2006/relationships" xmlns:p="http://schemas.openxmlformats.org/presentationml/2006/main">
-  <p:cSld>
-    <p:spTree>
-      <p:nvGrpSpPr>
-        <p:cNvPr id="1" name=""/>
-        <p:cNvGrpSpPr/>
-        <p:nvPr/>
-      </p:nvGrpSpPr>
-      <p:grpSpPr>
-        <a:xfrm>
-          <a:off x="0" y="0"/>
-          <a:ext cx="0" cy="0"/>
-          <a:chOff x="0" y="0"/>
-          <a:chExt cx="0" cy="0"/>
-        </a:xfrm>
-      </p:grpSpPr>
       <p:sp>
         <p:nvSpPr>
           <p:cNvPr id="2" name="Title 1">
@@ -7685,7 +7682,7 @@
 </p:sld>
 </file>
 
-<file path=ppt/slides/slide13.xml><?xml version="1.0" encoding="utf-8"?>
+<file path=ppt/slides/slide12.xml><?xml version="1.0" encoding="utf-8"?>
 <p:sld xmlns:a="http://schemas.openxmlformats.org/drawingml/2006/main" xmlns:r="http://schemas.openxmlformats.org/officeDocument/2006/relationships" xmlns:p="http://schemas.openxmlformats.org/presentationml/2006/main">
   <p:cSld>
     <p:bg>
@@ -10675,7 +10672,7 @@
 </p:sld>
 </file>
 
-<file path=ppt/slides/slide14.xml><?xml version="1.0" encoding="utf-8"?>
+<file path=ppt/slides/slide13.xml><?xml version="1.0" encoding="utf-8"?>
 <p:sld xmlns:a="http://schemas.openxmlformats.org/drawingml/2006/main" xmlns:r="http://schemas.openxmlformats.org/officeDocument/2006/relationships" xmlns:p="http://schemas.openxmlformats.org/presentationml/2006/main">
   <p:cSld>
     <p:spTree>
@@ -10850,7 +10847,7 @@
 </p:sld>
 </file>
 
-<file path=ppt/slides/slide15.xml><?xml version="1.0" encoding="utf-8"?>
+<file path=ppt/slides/slide14.xml><?xml version="1.0" encoding="utf-8"?>
 <p:sld xmlns:a="http://schemas.openxmlformats.org/drawingml/2006/main" xmlns:r="http://schemas.openxmlformats.org/officeDocument/2006/relationships" xmlns:p="http://schemas.openxmlformats.org/presentationml/2006/main">
   <p:cSld>
     <p:spTree>
@@ -11708,7 +11705,7 @@
 </p:sld>
 </file>
 
-<file path=ppt/slides/slide16.xml><?xml version="1.0" encoding="utf-8"?>
+<file path=ppt/slides/slide15.xml><?xml version="1.0" encoding="utf-8"?>
 <p:sld xmlns:a="http://schemas.openxmlformats.org/drawingml/2006/main" xmlns:r="http://schemas.openxmlformats.org/officeDocument/2006/relationships" xmlns:p="http://schemas.openxmlformats.org/presentationml/2006/main">
   <p:cSld>
     <p:spTree>
@@ -12715,7 +12712,7 @@
 </p:sld>
 </file>
 
-<file path=ppt/slides/slide17.xml><?xml version="1.0" encoding="utf-8"?>
+<file path=ppt/slides/slide16.xml><?xml version="1.0" encoding="utf-8"?>
 <p:sld xmlns:a="http://schemas.openxmlformats.org/drawingml/2006/main" xmlns:r="http://schemas.openxmlformats.org/officeDocument/2006/relationships" xmlns:p="http://schemas.openxmlformats.org/presentationml/2006/main">
   <p:cSld>
     <p:spTree>
@@ -14068,7 +14065,7 @@
 </p:sld>
 </file>
 
-<file path=ppt/slides/slide18.xml><?xml version="1.0" encoding="utf-8"?>
+<file path=ppt/slides/slide17.xml><?xml version="1.0" encoding="utf-8"?>
 <p:sld xmlns:a="http://schemas.openxmlformats.org/drawingml/2006/main" xmlns:r="http://schemas.openxmlformats.org/officeDocument/2006/relationships" xmlns:p="http://schemas.openxmlformats.org/presentationml/2006/main">
   <p:cSld>
     <p:spTree>
@@ -15035,7 +15032,7 @@
 </p:sld>
 </file>
 
-<file path=ppt/slides/slide19.xml><?xml version="1.0" encoding="utf-8"?>
+<file path=ppt/slides/slide18.xml><?xml version="1.0" encoding="utf-8"?>
 <p:sld xmlns:a="http://schemas.openxmlformats.org/drawingml/2006/main" xmlns:r="http://schemas.openxmlformats.org/officeDocument/2006/relationships" xmlns:p="http://schemas.openxmlformats.org/presentationml/2006/main">
   <p:cSld>
     <p:spTree>
@@ -16127,6 +16124,89 @@
     <p:extLst>
       <p:ext uri="{BB962C8B-B14F-4D97-AF65-F5344CB8AC3E}">
         <p14:creationId xmlns:p14="http://schemas.microsoft.com/office/powerpoint/2010/main" val="3953899169"/>
+      </p:ext>
+    </p:extLst>
+  </p:cSld>
+  <p:clrMapOvr>
+    <a:masterClrMapping/>
+  </p:clrMapOvr>
+</p:sld>
+</file>
+
+<file path=ppt/slides/slide19.xml><?xml version="1.0" encoding="utf-8"?>
+<p:sld xmlns:a="http://schemas.openxmlformats.org/drawingml/2006/main" xmlns:r="http://schemas.openxmlformats.org/officeDocument/2006/relationships" xmlns:p="http://schemas.openxmlformats.org/presentationml/2006/main">
+  <p:cSld>
+    <p:spTree>
+      <p:nvGrpSpPr>
+        <p:cNvPr id="1" name=""/>
+        <p:cNvGrpSpPr/>
+        <p:nvPr/>
+      </p:nvGrpSpPr>
+      <p:grpSpPr>
+        <a:xfrm>
+          <a:off x="0" y="0"/>
+          <a:ext cx="0" cy="0"/>
+          <a:chOff x="0" y="0"/>
+          <a:chExt cx="0" cy="0"/>
+        </a:xfrm>
+      </p:grpSpPr>
+      <p:sp>
+        <p:nvSpPr>
+          <p:cNvPr id="4" name="Title 3">
+            <a:extLst>
+              <a:ext uri="{FF2B5EF4-FFF2-40B4-BE49-F238E27FC236}">
+                <a16:creationId xmlns:a16="http://schemas.microsoft.com/office/drawing/2014/main" id="{3659BEB8-412D-F0EB-3625-9B14DBCA4A23}"/>
+              </a:ext>
+            </a:extLst>
+          </p:cNvPr>
+          <p:cNvSpPr>
+            <a:spLocks noGrp="1"/>
+          </p:cNvSpPr>
+          <p:nvPr>
+            <p:ph type="title"/>
+          </p:nvPr>
+        </p:nvSpPr>
+        <p:spPr/>
+        <p:txBody>
+          <a:bodyPr/>
+          <a:lstStyle/>
+          <a:p>
+            <a:r>
+              <a:rPr lang="en-US" dirty="0"/>
+              <a:t>In-Class Exercises</a:t>
+            </a:r>
+          </a:p>
+        </p:txBody>
+      </p:sp>
+      <p:sp>
+        <p:nvSpPr>
+          <p:cNvPr id="5" name="Text Placeholder 4">
+            <a:extLst>
+              <a:ext uri="{FF2B5EF4-FFF2-40B4-BE49-F238E27FC236}">
+                <a16:creationId xmlns:a16="http://schemas.microsoft.com/office/drawing/2014/main" id="{011C8E60-2801-F04C-C78F-C7D4A5781663}"/>
+              </a:ext>
+            </a:extLst>
+          </p:cNvPr>
+          <p:cNvSpPr>
+            <a:spLocks noGrp="1"/>
+          </p:cNvSpPr>
+          <p:nvPr>
+            <p:ph type="body" idx="1"/>
+          </p:nvPr>
+        </p:nvSpPr>
+        <p:spPr/>
+        <p:txBody>
+          <a:bodyPr/>
+          <a:lstStyle/>
+          <a:p>
+            <a:endParaRPr lang="en-US"/>
+          </a:p>
+        </p:txBody>
+      </p:sp>
+    </p:spTree>
+    <p:extLst>
+      <p:ext uri="{BB962C8B-B14F-4D97-AF65-F5344CB8AC3E}">
+        <p14:creationId xmlns:p14="http://schemas.microsoft.com/office/powerpoint/2010/main" val="1789827953"/>
       </p:ext>
     </p:extLst>
   </p:cSld>
@@ -16393,89 +16473,6 @@
           <p:cNvPr id="4" name="Title 3">
             <a:extLst>
               <a:ext uri="{FF2B5EF4-FFF2-40B4-BE49-F238E27FC236}">
-                <a16:creationId xmlns:a16="http://schemas.microsoft.com/office/drawing/2014/main" id="{3659BEB8-412D-F0EB-3625-9B14DBCA4A23}"/>
-              </a:ext>
-            </a:extLst>
-          </p:cNvPr>
-          <p:cNvSpPr>
-            <a:spLocks noGrp="1"/>
-          </p:cNvSpPr>
-          <p:nvPr>
-            <p:ph type="title"/>
-          </p:nvPr>
-        </p:nvSpPr>
-        <p:spPr/>
-        <p:txBody>
-          <a:bodyPr/>
-          <a:lstStyle/>
-          <a:p>
-            <a:r>
-              <a:rPr lang="en-US" dirty="0"/>
-              <a:t>In-Class Exercises</a:t>
-            </a:r>
-          </a:p>
-        </p:txBody>
-      </p:sp>
-      <p:sp>
-        <p:nvSpPr>
-          <p:cNvPr id="5" name="Text Placeholder 4">
-            <a:extLst>
-              <a:ext uri="{FF2B5EF4-FFF2-40B4-BE49-F238E27FC236}">
-                <a16:creationId xmlns:a16="http://schemas.microsoft.com/office/drawing/2014/main" id="{011C8E60-2801-F04C-C78F-C7D4A5781663}"/>
-              </a:ext>
-            </a:extLst>
-          </p:cNvPr>
-          <p:cNvSpPr>
-            <a:spLocks noGrp="1"/>
-          </p:cNvSpPr>
-          <p:nvPr>
-            <p:ph type="body" idx="1"/>
-          </p:nvPr>
-        </p:nvSpPr>
-        <p:spPr/>
-        <p:txBody>
-          <a:bodyPr/>
-          <a:lstStyle/>
-          <a:p>
-            <a:endParaRPr lang="en-US"/>
-          </a:p>
-        </p:txBody>
-      </p:sp>
-    </p:spTree>
-    <p:extLst>
-      <p:ext uri="{BB962C8B-B14F-4D97-AF65-F5344CB8AC3E}">
-        <p14:creationId xmlns:p14="http://schemas.microsoft.com/office/powerpoint/2010/main" val="1789827953"/>
-      </p:ext>
-    </p:extLst>
-  </p:cSld>
-  <p:clrMapOvr>
-    <a:masterClrMapping/>
-  </p:clrMapOvr>
-</p:sld>
-</file>
-
-<file path=ppt/slides/slide21.xml><?xml version="1.0" encoding="utf-8"?>
-<p:sld xmlns:a="http://schemas.openxmlformats.org/drawingml/2006/main" xmlns:r="http://schemas.openxmlformats.org/officeDocument/2006/relationships" xmlns:p="http://schemas.openxmlformats.org/presentationml/2006/main">
-  <p:cSld>
-    <p:spTree>
-      <p:nvGrpSpPr>
-        <p:cNvPr id="1" name=""/>
-        <p:cNvGrpSpPr/>
-        <p:nvPr/>
-      </p:nvGrpSpPr>
-      <p:grpSpPr>
-        <a:xfrm>
-          <a:off x="0" y="0"/>
-          <a:ext cx="0" cy="0"/>
-          <a:chOff x="0" y="0"/>
-          <a:chExt cx="0" cy="0"/>
-        </a:xfrm>
-      </p:grpSpPr>
-      <p:sp>
-        <p:nvSpPr>
-          <p:cNvPr id="4" name="Title 3">
-            <a:extLst>
-              <a:ext uri="{FF2B5EF4-FFF2-40B4-BE49-F238E27FC236}">
                 <a16:creationId xmlns:a16="http://schemas.microsoft.com/office/drawing/2014/main" id="{A50152F8-99B8-D4AE-EA6A-FF8305CB6052}"/>
               </a:ext>
             </a:extLst>
@@ -17143,7 +17140,7 @@
 </p:sld>
 </file>
 
-<file path=ppt/slides/slide22.xml><?xml version="1.0" encoding="utf-8"?>
+<file path=ppt/slides/slide21.xml><?xml version="1.0" encoding="utf-8"?>
 <p:sld xmlns:a="http://schemas.openxmlformats.org/drawingml/2006/main" xmlns:r="http://schemas.openxmlformats.org/officeDocument/2006/relationships" xmlns:p="http://schemas.openxmlformats.org/presentationml/2006/main">
   <p:cSld>
     <p:spTree>
